--- a/presentation/defense-draft.pptx
+++ b/presentation/defense-draft.pptx
@@ -4224,7 +4224,7 @@
               <a:defRPr sz="2000"/>
             </a:pPr>
             <a:r>
-              <a:t>48 In06: рабочий вариант для проверки</a:t>
+              <a:t>32 In06: схема после расчётного сравнения</a:t>
             </a:r>
           </a:p>
           <a:p>
@@ -4246,7 +4246,7 @@
               <a:defRPr sz="2000"/>
             </a:pPr>
             <a:r>
-              <a:t>ВК не найдена: точка ввода требует согласования</a:t>
+              <a:t>Проектная ВК: часть 104.2; собственное допущение</a:t>
             </a:r>
           </a:p>
           <a:p>
@@ -4376,7 +4376,7 @@
               <a:defRPr sz="2000"/>
             </a:pPr>
             <a:r>
-              <a:t>Контрольные точки: 5 / 10 / 15 / 20 м</a:t>
+              <a:t>384 RF-точек и 35007 ячеек карты; шаг 0.25 м</a:t>
             </a:r>
           </a:p>
           <a:p>
@@ -4387,7 +4387,7 @@
               <a:defRPr sz="2000"/>
             </a:pPr>
             <a:r>
-              <a:t>Пилот 23 дБм: несколько возможных нормировок</a:t>
+              <a:t>P1, n=2,5, стены/колонны: B3/B1/B7 — 95.78%/95.78%/95.77%</a:t>
             </a:r>
           </a:p>
           <a:p>
@@ -4398,7 +4398,7 @@
               <a:defRPr sz="2000"/>
             </a:pPr>
             <a:r>
-              <a:t>Худшая ветвь кандидата: 31.0 дБ RF-потерь</a:t>
+              <a:t>B7 с дополнительными 3 дБ потерь: 93.91%</a:t>
             </a:r>
           </a:p>
           <a:p>
@@ -4409,7 +4409,7 @@
               <a:defRPr sz="2000"/>
             </a:pPr>
             <a:r>
-              <a:t>Потери стен: 15 дБ; колонн и фасада: 30 дБ</a:t>
+              <a:t>45,52 м² помещения 89 считаются непокрытыми</a:t>
             </a:r>
           </a:p>
           <a:p>
@@ -4420,7 +4420,7 @@
               <a:defRPr sz="2000"/>
             </a:pPr>
             <a:r>
-              <a:t>KPI площади и SINR ещё не подтверждены</a:t>
+              <a:t>Прогноз модели; SINR, RSRQ и фактические KPI не подтверждены</a:t>
             </a:r>
           </a:p>
         </p:txBody>
@@ -4526,7 +4526,7 @@
               <a:defRPr sz="2000"/>
             </a:pPr>
             <a:r>
-              <a:t>48 антенн; 24 PC252; 8 PC251; 8 PC211; 6 PC221; 1 PC250</a:t>
+              <a:t>32 антенн; 16 PC252; 0 PC251; 8 PC211; 6 PC221; 9 PC250</a:t>
             </a:r>
           </a:p>
           <a:p>
@@ -4537,7 +4537,7 @@
               <a:defRPr sz="2000"/>
             </a:pPr>
             <a:r>
-              <a:t>Фидеры без резерва: 1/2 — 576.6 м; 7/8 — 1272.4 м</a:t>
+              <a:t>Фидеры без резерва: 1/2 — 362.7 м; 7/8 — 721.5 м</a:t>
             </a:r>
           </a:p>
           <a:p>
@@ -4687,7 +4687,7 @@
               <a:defRPr sz="2000"/>
             </a:pPr>
             <a:r>
-              <a:t>До сдачи: ВК, помещение 89, пилот, параметры компонентов, карты KPI</a:t>
+              <a:t>Приняты допущения: ВК в 104.2, нормировка пилота, параметры компонентов и модель стен</a:t>
             </a:r>
           </a:p>
           <a:p>

--- a/presentation/defense-draft.pptx
+++ b/presentation/defense-draft.pptx
@@ -4398,7 +4398,7 @@
               <a:defRPr sz="2000"/>
             </a:pPr>
             <a:r>
-              <a:t>B7 с дополнительными 3 дБ потерь: 93.91%</a:t>
+              <a:t>B7 с дополнительными 3 дБ потерь: 93.65%</a:t>
             </a:r>
           </a:p>
           <a:p>

--- a/presentation/defense-draft.pptx
+++ b/presentation/defense-draft.pptx
@@ -4376,7 +4376,7 @@
               <a:defRPr sz="2000"/>
             </a:pPr>
             <a:r>
-              <a:t>384 RF-точек и 35007 ячеек карты; шаг 0.25 м</a:t>
+              <a:t>384 RF-точек и 35522 ячеек карты; шаг 0.25 м</a:t>
             </a:r>
           </a:p>
           <a:p>
@@ -4387,7 +4387,7 @@
               <a:defRPr sz="2000"/>
             </a:pPr>
             <a:r>
-              <a:t>P1, n=2,5, стены/колонны: B3/B1/B7 — 95.78%/95.78%/95.77%</a:t>
+              <a:t>P1, n=2,5, стены/колонны: B3/B1/B7 — 96.56%/96.55%/96.55%</a:t>
             </a:r>
           </a:p>
           <a:p>
@@ -4398,7 +4398,7 @@
               <a:defRPr sz="2000"/>
             </a:pPr>
             <a:r>
-              <a:t>B7 с дополнительными 3 дБ потерь: 93.65%</a:t>
+              <a:t>B7 с дополнительными 3 дБ потерь: 96.32%</a:t>
             </a:r>
           </a:p>
           <a:p>
@@ -4537,7 +4537,7 @@
               <a:defRPr sz="2000"/>
             </a:pPr>
             <a:r>
-              <a:t>Фидеры без резерва: 1/2 — 362.7 м; 7/8 — 721.5 м</a:t>
+              <a:t>Фидеры без резерва: 1/2 — 265.3 м; 7/8 — 1196.0 м</a:t>
             </a:r>
           </a:p>
           <a:p>

--- a/presentation/defense-draft.pptx
+++ b/presentation/defense-draft.pptx
@@ -4387,7 +4387,7 @@
               <a:defRPr sz="2000"/>
             </a:pPr>
             <a:r>
-              <a:t>P1, n=2,5, стены/колонны: B3/B1/B7 — 96.56%/96.55%/96.55%</a:t>
+              <a:t>P1, n=2,5, стены/колонны: B3/B1/B7 — 96.59%/96.58%/96.58%</a:t>
             </a:r>
           </a:p>
           <a:p>
@@ -4398,7 +4398,7 @@
               <a:defRPr sz="2000"/>
             </a:pPr>
             <a:r>
-              <a:t>B7 с дополнительными 3 дБ потерь: 96.32%</a:t>
+              <a:t>B7 с дополнительными 3 дБ потерь: 96.51%</a:t>
             </a:r>
           </a:p>
           <a:p>
@@ -4537,7 +4537,7 @@
               <a:defRPr sz="2000"/>
             </a:pPr>
             <a:r>
-              <a:t>Фидеры без резерва: 1/2 — 265.3 м; 7/8 — 1196.0 м</a:t>
+              <a:t>Фидеры без резерва: 1/2 — 162.3 м; 7/8 — 1241.4 м</a:t>
             </a:r>
           </a:p>
           <a:p>
